--- a/docs/wontx_ai_presentation.pptx
+++ b/docs/wontx_ai_presentation.pptx
@@ -41,7 +41,7 @@
       <p:bold r:id="rId27"/>
     </p:embeddedFont>
     <p:embeddedFont>
-      <p:font typeface="Calibri" pitchFamily="34" charset="0"/>
+      <p:font typeface="Urbanist" charset="0"/>
       <p:regular r:id="rId28"/>
       <p:bold r:id="rId29"/>
       <p:italic r:id="rId30"/>
@@ -55,7 +55,7 @@
       <p:boldItalic r:id="rId35"/>
     </p:embeddedFont>
     <p:embeddedFont>
-      <p:font typeface="Urbanist" charset="0"/>
+      <p:font typeface="Calibri" pitchFamily="34" charset="0"/>
       <p:regular r:id="rId36"/>
       <p:bold r:id="rId37"/>
       <p:italic r:id="rId38"/>
@@ -13278,94 +13278,18 @@
   <p:clrMapOvr>
     <a:masterClrMapping/>
   </p:clrMapOvr>
-  <mc:AlternateContent xmlns:mc="http://schemas.openxmlformats.org/markup-compatibility/2006" xmlns:p14="http://schemas.microsoft.com/office/powerpoint/2010/main">
-    <mc:Choice Requires="p14">
-      <p:transition p14:dur="10"/>
+  <mc:AlternateContent xmlns:mc="http://schemas.openxmlformats.org/markup-compatibility/2006">
+    <mc:Choice xmlns:p14="http://schemas.microsoft.com/office/powerpoint/2010/main" Requires="p14">
+      <p:transition p14:dur="0"/>
     </mc:Choice>
-    <mc:Fallback xmlns="">
+    <mc:Fallback>
       <p:transition/>
     </mc:Fallback>
   </mc:AlternateContent>
   <p:timing>
     <p:tnLst>
       <p:par>
-        <p:cTn id="1" dur="indefinite" restart="never" nodeType="tmRoot">
-          <p:childTnLst>
-            <p:seq concurrent="1" nextAc="seek">
-              <p:cTn id="2" dur="indefinite" nodeType="mainSeq">
-                <p:childTnLst>
-                  <p:par>
-                    <p:cTn id="3" fill="hold">
-                      <p:stCondLst>
-                        <p:cond delay="indefinite"/>
-                      </p:stCondLst>
-                      <p:childTnLst>
-                        <p:par>
-                          <p:cTn id="4" fill="hold">
-                            <p:stCondLst>
-                              <p:cond delay="0"/>
-                            </p:stCondLst>
-                            <p:childTnLst>
-                              <p:par>
-                                <p:cTn id="5" presetID="22" presetClass="entr" presetSubtype="4" fill="hold" nodeType="clickEffect">
-                                  <p:stCondLst>
-                                    <p:cond delay="0"/>
-                                  </p:stCondLst>
-                                  <p:childTnLst>
-                                    <p:set>
-                                      <p:cBhvr>
-                                        <p:cTn id="6" dur="1" fill="hold">
-                                          <p:stCondLst>
-                                            <p:cond delay="0"/>
-                                          </p:stCondLst>
-                                        </p:cTn>
-                                        <p:tgtEl>
-                                          <p:spTgt spid="84"/>
-                                        </p:tgtEl>
-                                        <p:attrNameLst>
-                                          <p:attrName>style.visibility</p:attrName>
-                                        </p:attrNameLst>
-                                      </p:cBhvr>
-                                      <p:to>
-                                        <p:strVal val="visible"/>
-                                      </p:to>
-                                    </p:set>
-                                    <p:animEffect transition="in" filter="wipe(down)">
-                                      <p:cBhvr>
-                                        <p:cTn id="7" dur="500"/>
-                                        <p:tgtEl>
-                                          <p:spTgt spid="84"/>
-                                        </p:tgtEl>
-                                      </p:cBhvr>
-                                    </p:animEffect>
-                                  </p:childTnLst>
-                                </p:cTn>
-                              </p:par>
-                            </p:childTnLst>
-                          </p:cTn>
-                        </p:par>
-                      </p:childTnLst>
-                    </p:cTn>
-                  </p:par>
-                </p:childTnLst>
-              </p:cTn>
-              <p:prevCondLst>
-                <p:cond evt="onPrev" delay="0">
-                  <p:tgtEl>
-                    <p:sldTgt/>
-                  </p:tgtEl>
-                </p:cond>
-              </p:prevCondLst>
-              <p:nextCondLst>
-                <p:cond evt="onNext" delay="0">
-                  <p:tgtEl>
-                    <p:sldTgt/>
-                  </p:tgtEl>
-                </p:cond>
-              </p:nextCondLst>
-            </p:seq>
-          </p:childTnLst>
-        </p:cTn>
+        <p:cTn id="1" dur="indefinite" restart="never" nodeType="tmRoot"/>
       </p:par>
     </p:tnLst>
   </p:timing>
@@ -14891,7 +14815,7 @@
               <a:buNone/>
             </a:pPr>
             <a:r>
-              <a:rPr lang="en-US" sz="2100" b="0" i="0" u="none" strike="noStrike" cap="none">
+              <a:rPr lang="en-US" sz="2100" b="0" i="0" u="none" strike="noStrike" cap="none" dirty="0">
                 <a:solidFill>
                   <a:srgbClr val="EF4444"/>
                 </a:solidFill>
@@ -14903,7 +14827,7 @@
               <a:t>-</a:t>
             </a:r>
             <a:r>
-              <a:rPr lang="en-US" sz="2100">
+              <a:rPr lang="en-US" sz="2100" dirty="0">
                 <a:solidFill>
                   <a:srgbClr val="EF4444"/>
                 </a:solidFill>
@@ -14915,7 +14839,7 @@
               <a:t>300</a:t>
             </a:r>
             <a:r>
-              <a:rPr lang="en-US" sz="2100" b="0" i="0" u="none" strike="noStrike" cap="none">
+              <a:rPr lang="en-US" sz="2100" b="0" i="0" u="none" strike="noStrike" cap="none" dirty="0">
                 <a:solidFill>
                   <a:srgbClr val="EF4444"/>
                 </a:solidFill>
@@ -14924,10 +14848,10 @@
                 <a:cs typeface="Urbanist Medium"/>
                 <a:sym typeface="Urbanist Medium"/>
               </a:rPr>
-              <a:t> (Critical Penalty), -100 (F</a:t>
+              <a:t> (Critical Penalty</a:t>
             </a:r>
             <a:r>
-              <a:rPr lang="en-US" sz="2100">
+              <a:rPr lang="en-US" sz="2100" b="0" i="0" u="none" strike="noStrike" cap="none" dirty="0" smtClean="0">
                 <a:solidFill>
                   <a:srgbClr val="EF4444"/>
                 </a:solidFill>
@@ -14936,9 +14860,9 @@
                 <a:cs typeface="Urbanist Medium"/>
                 <a:sym typeface="Urbanist Medium"/>
               </a:rPr>
-              <a:t>P)</a:t>
+              <a:t>)</a:t>
             </a:r>
-            <a:endParaRPr/>
+            <a:endParaRPr dirty="0"/>
           </a:p>
         </p:txBody>
       </p:sp>
@@ -16109,8 +16033,8 @@
         </p:nvSpPr>
         <p:spPr>
           <a:xfrm>
-            <a:off x="6381750" y="4537769"/>
-            <a:ext cx="5229225" cy="571500"/>
+            <a:off x="6381750" y="4792810"/>
+            <a:ext cx="5229225" cy="692497"/>
           </a:xfrm>
           <a:prstGeom prst="rect">
             <a:avLst/>
@@ -16139,7 +16063,7 @@
               <a:buNone/>
             </a:pPr>
             <a:r>
-              <a:rPr lang="en-US" sz="1500" b="0" i="0" u="none" strike="noStrike" cap="none">
+              <a:rPr lang="en-US" sz="1500" b="0" i="0" u="none" strike="noStrike" cap="none" dirty="0">
                 <a:solidFill>
                   <a:srgbClr val="CBD5E1"/>
                 </a:solidFill>
@@ -16148,10 +16072,46 @@
                 <a:cs typeface="Urbanist"/>
                 <a:sym typeface="Urbanist"/>
               </a:rPr>
-              <a:t>The remaining 16% is attributed to </a:t>
+              <a:t>The remaining </a:t>
             </a:r>
             <a:r>
-              <a:rPr lang="en-US" sz="1500" b="0" i="1" u="none" strike="noStrike" cap="none">
+              <a:rPr lang="en-US" sz="1500" dirty="0" smtClean="0">
+                <a:solidFill>
+                  <a:srgbClr val="CBD5E1"/>
+                </a:solidFill>
+                <a:latin typeface="Urbanist"/>
+                <a:ea typeface="Urbanist"/>
+                <a:cs typeface="Urbanist"/>
+                <a:sym typeface="Urbanist"/>
+              </a:rPr>
+              <a:t>23..74</a:t>
+            </a:r>
+            <a:r>
+              <a:rPr lang="en-US" sz="1500" b="0" i="0" u="none" strike="noStrike" cap="none" dirty="0" smtClean="0">
+                <a:solidFill>
+                  <a:srgbClr val="CBD5E1"/>
+                </a:solidFill>
+                <a:latin typeface="Urbanist"/>
+                <a:ea typeface="Urbanist"/>
+                <a:cs typeface="Urbanist"/>
+                <a:sym typeface="Urbanist"/>
+              </a:rPr>
+              <a:t>% </a:t>
+            </a:r>
+            <a:r>
+              <a:rPr lang="en-US" sz="1500" b="0" i="0" u="none" strike="noStrike" cap="none" dirty="0">
+                <a:solidFill>
+                  <a:srgbClr val="CBD5E1"/>
+                </a:solidFill>
+                <a:latin typeface="Urbanist"/>
+                <a:ea typeface="Urbanist"/>
+                <a:cs typeface="Urbanist"/>
+                <a:sym typeface="Urbanist"/>
+              </a:rPr>
+              <a:t>is attributed to </a:t>
+            </a:r>
+            <a:r>
+              <a:rPr lang="en-US" sz="1500" b="0" i="1" u="none" strike="noStrike" cap="none" dirty="0">
                 <a:solidFill>
                   <a:srgbClr val="CBD5E1"/>
                 </a:solidFill>
@@ -16163,7 +16123,7 @@
               <a:t>Adaptive Overlap</a:t>
             </a:r>
             <a:r>
-              <a:rPr lang="en-US" sz="1500" b="0" i="0" u="none" strike="noStrike" cap="none">
+              <a:rPr lang="en-US" sz="1500" b="0" i="0" u="none" strike="noStrike" cap="none" dirty="0">
                 <a:solidFill>
                   <a:srgbClr val="CBD5E1"/>
                 </a:solidFill>
@@ -16174,7 +16134,7 @@
               </a:rPr>
               <a:t>, where intruder noise mimics owner habits temporarily.</a:t>
             </a:r>
-            <a:endParaRPr/>
+            <a:endParaRPr dirty="0"/>
           </a:p>
         </p:txBody>
       </p:sp>
@@ -16833,7 +16793,7 @@
         <p:spPr>
           <a:xfrm>
             <a:off x="581025" y="4451449"/>
-            <a:ext cx="5229225" cy="295275"/>
+            <a:ext cx="5229225" cy="346249"/>
           </a:xfrm>
           <a:prstGeom prst="rect">
             <a:avLst/>
@@ -16862,9 +16822,9 @@
               <a:buNone/>
             </a:pPr>
             <a:r>
-              <a:rPr lang="en-US" sz="1500" b="0" i="0" u="none" strike="noStrike" cap="none">
-                <a:solidFill>
-                  <a:srgbClr val="CBD5E1"/>
+              <a:rPr lang="en-US" sz="1500" b="0" i="0" u="none" strike="noStrike" cap="none" dirty="0">
+                <a:solidFill>
+                  <a:srgbClr val="FFC000"/>
                 </a:solidFill>
                 <a:latin typeface="Urbanist"/>
                 <a:ea typeface="Urbanist"/>
@@ -16873,7 +16833,11 @@
               </a:rPr>
               <a:t>rundll32.exe user32.dll,LockWorkStation</a:t>
             </a:r>
-            <a:endParaRPr/>
+            <a:endParaRPr dirty="0">
+              <a:solidFill>
+                <a:srgbClr val="FFC000"/>
+              </a:solidFill>
+            </a:endParaRPr>
           </a:p>
         </p:txBody>
       </p:sp>
@@ -17437,7 +17401,19 @@
                 <a:cs typeface="Urbanist Medium"/>
                 <a:sym typeface="Urbanist Medium"/>
               </a:rPr>
-              <a:t>System Security (Laptop/PC</a:t>
+              <a:t>System Security (</a:t>
+            </a:r>
+            <a:r>
+              <a:rPr lang="en-GB" sz="1800" dirty="0" smtClean="0">
+                <a:solidFill>
+                  <a:srgbClr val="00B050"/>
+                </a:solidFill>
+                <a:latin typeface="Urbanist Medium"/>
+                <a:ea typeface="Urbanist Medium"/>
+                <a:cs typeface="Urbanist Medium"/>
+                <a:sym typeface="Urbanist Medium"/>
+              </a:rPr>
+              <a:t>Laptop/PC)</a:t>
             </a:r>
             <a:endParaRPr sz="1100" dirty="0">
               <a:solidFill>
@@ -18300,7 +18276,7 @@
               <a:buNone/>
             </a:pPr>
             <a:r>
-              <a:rPr lang="en-US" sz="3600" b="1" i="0" u="none" strike="noStrike" cap="none">
+              <a:rPr lang="en-US" sz="3600" b="1" i="0" u="none" strike="noStrike" cap="none" dirty="0">
                 <a:solidFill>
                   <a:srgbClr val="F8FAFC"/>
                 </a:solidFill>
@@ -18311,7 +18287,7 @@
               </a:rPr>
               <a:t>Behind the Name: WONTX</a:t>
             </a:r>
-            <a:endParaRPr/>
+            <a:endParaRPr dirty="0"/>
           </a:p>
         </p:txBody>
       </p:sp>
@@ -18368,16 +18344,12 @@
   <p:clrMapOvr>
     <a:masterClrMapping/>
   </p:clrMapOvr>
-  <mc:AlternateContent xmlns:mc="http://schemas.openxmlformats.org/markup-compatibility/2006" xmlns:p14="http://schemas.microsoft.com/office/powerpoint/2010/main">
-    <mc:Choice Requires="p14">
-      <p:transition spd="slow" p14:dur="1750">
-        <p14:reveal/>
-      </p:transition>
+  <mc:AlternateContent xmlns:mc="http://schemas.openxmlformats.org/markup-compatibility/2006">
+    <mc:Choice xmlns:p14="http://schemas.microsoft.com/office/powerpoint/2010/main" Requires="p14">
+      <p:transition p14:dur="10"/>
     </mc:Choice>
-    <mc:Fallback xmlns="">
-      <p:transition spd="slow">
-        <p:fade/>
-      </p:transition>
+    <mc:Fallback>
+      <p:transition/>
     </mc:Fallback>
   </mc:AlternateContent>
   <p:timing>
@@ -20333,7 +20305,7 @@
         <p:spPr>
           <a:xfrm>
             <a:off x="876300" y="3918644"/>
-            <a:ext cx="10439400" cy="285750"/>
+            <a:ext cx="10439400" cy="346249"/>
           </a:xfrm>
           <a:prstGeom prst="rect">
             <a:avLst/>
@@ -20362,7 +20334,7 @@
               <a:buNone/>
             </a:pPr>
             <a:r>
-              <a:rPr lang="en-US" sz="1500" b="0" i="0" u="none" strike="noStrike" cap="none">
+              <a:rPr lang="en-US" sz="1500" b="0" i="0" u="none" strike="noStrike" cap="none" dirty="0">
                 <a:solidFill>
                   <a:srgbClr val="CBD5E1"/>
                 </a:solidFill>
@@ -20374,7 +20346,7 @@
               <a:t>We have successfully moved from </a:t>
             </a:r>
             <a:r>
-              <a:rPr lang="en-US" sz="1500" b="1" i="0" u="none" strike="noStrike" cap="none">
+              <a:rPr lang="en-US" sz="1500" b="1" i="0" u="none" strike="noStrike" cap="none" dirty="0">
                 <a:solidFill>
                   <a:srgbClr val="CBD5E1"/>
                 </a:solidFill>
@@ -20386,7 +20358,7 @@
               <a:t>Static Credentials</a:t>
             </a:r>
             <a:r>
-              <a:rPr lang="en-US" sz="1500" b="0" i="0" u="none" strike="noStrike" cap="none">
+              <a:rPr lang="en-US" sz="1500" b="0" i="0" u="none" strike="noStrike" cap="none" dirty="0">
                 <a:solidFill>
                   <a:srgbClr val="CBD5E1"/>
                 </a:solidFill>
@@ -20395,10 +20367,10 @@
                 <a:cs typeface="Urbanist"/>
                 <a:sym typeface="Urbanist"/>
               </a:rPr>
-              <a:t> to </a:t>
+              <a:t> </a:t>
             </a:r>
             <a:r>
-              <a:rPr lang="en-US" sz="1500" b="1" i="0" u="none" strike="noStrike" cap="none">
+              <a:rPr lang="en-US" sz="1500" b="0" i="0" u="none" strike="noStrike" cap="none" dirty="0" smtClean="0">
                 <a:solidFill>
                   <a:srgbClr val="CBD5E1"/>
                 </a:solidFill>
@@ -20407,10 +20379,22 @@
                 <a:cs typeface="Urbanist"/>
                 <a:sym typeface="Urbanist"/>
               </a:rPr>
-              <a:t>Neural Habits</a:t>
+              <a:t>to </a:t>
             </a:r>
             <a:r>
-              <a:rPr lang="en-US" sz="1500" b="0" i="0" u="none" strike="noStrike" cap="none">
+              <a:rPr lang="en-US" sz="1500" b="1" i="0" u="none" strike="noStrike" cap="none" dirty="0" smtClean="0">
+                <a:solidFill>
+                  <a:srgbClr val="CBD5E1"/>
+                </a:solidFill>
+                <a:latin typeface="Urbanist"/>
+                <a:ea typeface="Urbanist"/>
+                <a:cs typeface="Urbanist"/>
+                <a:sym typeface="Urbanist"/>
+              </a:rPr>
+              <a:t>Habits</a:t>
+            </a:r>
+            <a:r>
+              <a:rPr lang="en-US" sz="1500" b="0" i="0" u="none" strike="noStrike" cap="none" dirty="0">
                 <a:solidFill>
                   <a:srgbClr val="CBD5E1"/>
                 </a:solidFill>
@@ -20421,7 +20405,7 @@
               </a:rPr>
               <a:t>.</a:t>
             </a:r>
-            <a:endParaRPr/>
+            <a:endParaRPr dirty="0"/>
           </a:p>
         </p:txBody>
       </p:sp>
@@ -21747,7 +21731,7 @@
                 <a:buNone/>
               </a:pPr>
               <a:r>
-                <a:rPr lang="en-US" sz="1500" b="1" i="0" u="none" strike="noStrike" cap="none">
+                <a:rPr lang="en-US" sz="1500" b="1" i="0" u="none" strike="noStrike" cap="none" dirty="0">
                   <a:solidFill>
                     <a:srgbClr val="CBD5E1"/>
                   </a:solidFill>
@@ -21759,7 +21743,7 @@
                 <a:t>Database:</a:t>
               </a:r>
               <a:r>
-                <a:rPr lang="en-US" sz="1500" b="0" i="0" u="none" strike="noStrike" cap="none">
+                <a:rPr lang="en-US" sz="1500" b="0" i="0" u="none" strike="noStrike" cap="none" dirty="0">
                   <a:solidFill>
                     <a:srgbClr val="CBD5E1"/>
                   </a:solidFill>
@@ -21770,7 +21754,7 @@
                 </a:rPr>
                 <a:t> SQLite3 (Local telemetry storage)</a:t>
               </a:r>
-              <a:endParaRPr/>
+              <a:endParaRPr dirty="0"/>
             </a:p>
           </p:txBody>
         </p:sp>
@@ -21812,7 +21796,7 @@
                 <a:buNone/>
               </a:pPr>
               <a:r>
-                <a:rPr lang="en-US" sz="1500" b="1" i="0" u="none" strike="noStrike" cap="none">
+                <a:rPr lang="en-US" sz="1500" b="1" i="0" u="none" strike="noStrike" cap="none" dirty="0">
                   <a:solidFill>
                     <a:srgbClr val="CBD5E1"/>
                   </a:solidFill>
@@ -21824,7 +21808,7 @@
                 <a:t>OS Integration:</a:t>
               </a:r>
               <a:r>
-                <a:rPr lang="en-US" sz="1500" b="0" i="0" u="none" strike="noStrike" cap="none">
+                <a:rPr lang="en-US" sz="1500" b="0" i="0" u="none" strike="noStrike" cap="none" dirty="0">
                   <a:solidFill>
                     <a:srgbClr val="CBD5E1"/>
                   </a:solidFill>
@@ -21835,7 +21819,7 @@
                 </a:rPr>
                 <a:t> Windows/Linux Native APIs</a:t>
               </a:r>
-              <a:endParaRPr/>
+              <a:endParaRPr dirty="0"/>
             </a:p>
           </p:txBody>
         </p:sp>
@@ -22072,7 +22056,7 @@
                 <a:buNone/>
               </a:pPr>
               <a:r>
-                <a:rPr lang="en-US" sz="1500" b="0" i="0" u="none" strike="noStrike" cap="none">
+                <a:rPr lang="en-US" sz="1500" b="0" i="0" u="none" strike="noStrike" cap="none" dirty="0">
                   <a:solidFill>
                     <a:srgbClr val="CBD5E1"/>
                   </a:solidFill>
@@ -22084,7 +22068,7 @@
                 <a:t>Minimum 4GB RAM for real</a:t>
               </a:r>
               <a:r>
-                <a:rPr lang="en-US" sz="1500">
+                <a:rPr lang="en-US" sz="1500" dirty="0">
                   <a:solidFill>
                     <a:srgbClr val="CBD5E1"/>
                   </a:solidFill>
@@ -22096,7 +22080,7 @@
                 <a:t> </a:t>
               </a:r>
               <a:r>
-                <a:rPr lang="en-US" sz="1500" b="0" i="0" u="none" strike="noStrike" cap="none">
+                <a:rPr lang="en-US" sz="1500" b="0" i="0" u="none" strike="noStrike" cap="none" dirty="0">
                   <a:solidFill>
                     <a:srgbClr val="CBD5E1"/>
                   </a:solidFill>
@@ -22107,7 +22091,7 @@
                 </a:rPr>
                 <a:t>time RL processing</a:t>
               </a:r>
-              <a:endParaRPr/>
+              <a:endParaRPr dirty="0"/>
             </a:p>
           </p:txBody>
         </p:sp>
@@ -22284,7 +22268,7 @@
           <p:nvPr>
             <p:extLst>
               <p:ext uri="{D42A27DB-BD31-4B8C-83A1-F6EECF244321}">
-                <p14:modId xmlns:p14="http://schemas.microsoft.com/office/powerpoint/2010/main" val="3781964270"/>
+                <p14:modId xmlns:p14="http://schemas.microsoft.com/office/powerpoint/2010/main" val="1398196873"/>
               </p:ext>
             </p:extLst>
           </p:nvPr>
@@ -22333,6 +22317,9 @@
                           <a:solidFill>
                             <a:srgbClr val="00B050"/>
                           </a:solidFill>
+                          <a:latin typeface="Urbanist Medium" charset="0"/>
+                          <a:ea typeface="Urbanist Medium" charset="0"/>
+                          <a:cs typeface="Urbanist Medium" charset="0"/>
                           <a:sym typeface="Urbanist Medium"/>
                         </a:rPr>
                         <a:t>Library</a:t>
@@ -22341,6 +22328,9 @@
                         <a:solidFill>
                           <a:srgbClr val="00B050"/>
                         </a:solidFill>
+                        <a:latin typeface="Urbanist Medium" charset="0"/>
+                        <a:ea typeface="Urbanist Medium" charset="0"/>
+                        <a:cs typeface="Urbanist Medium" charset="0"/>
                       </a:endParaRPr>
                     </a:p>
                   </a:txBody>
@@ -22375,6 +22365,9 @@
                           <a:solidFill>
                             <a:srgbClr val="00B050"/>
                           </a:solidFill>
+                          <a:latin typeface="Urbanist Medium" charset="0"/>
+                          <a:ea typeface="Urbanist Medium" charset="0"/>
+                          <a:cs typeface="Urbanist Medium" charset="0"/>
                           <a:sym typeface="Urbanist Medium"/>
                         </a:rPr>
                         <a:t>Purpose in WONTX AI</a:t>
@@ -22383,6 +22376,9 @@
                         <a:solidFill>
                           <a:srgbClr val="00B050"/>
                         </a:solidFill>
+                        <a:latin typeface="Urbanist Medium" charset="0"/>
+                        <a:ea typeface="Urbanist Medium" charset="0"/>
+                        <a:cs typeface="Urbanist Medium" charset="0"/>
                       </a:endParaRPr>
                     </a:p>
                   </a:txBody>
@@ -22411,6 +22407,9 @@
                               <a:lumMod val="85000"/>
                             </a:schemeClr>
                           </a:solidFill>
+                          <a:latin typeface="Urbanist" charset="0"/>
+                          <a:ea typeface="Urbanist" charset="0"/>
+                          <a:cs typeface="Urbanist" charset="0"/>
                           <a:sym typeface="Urbanist"/>
                         </a:rPr>
                         <a:t>Pynput</a:t>
@@ -22450,6 +22449,9 @@
                               <a:lumMod val="85000"/>
                             </a:schemeClr>
                           </a:solidFill>
+                          <a:latin typeface="Urbanist" charset="0"/>
+                          <a:ea typeface="Urbanist" charset="0"/>
+                          <a:cs typeface="Urbanist" charset="0"/>
                           <a:sym typeface="Urbanist"/>
                         </a:rPr>
                         <a:t>Global input hooks for Mouse &amp; Keyboard monitoring.</a:t>
@@ -22491,6 +22493,9 @@
                               <a:lumMod val="85000"/>
                             </a:schemeClr>
                           </a:solidFill>
+                          <a:latin typeface="Urbanist" charset="0"/>
+                          <a:ea typeface="Urbanist" charset="0"/>
+                          <a:cs typeface="Urbanist" charset="0"/>
                           <a:sym typeface="Urbanist"/>
                         </a:rPr>
                         <a:t>NumPy</a:t>
@@ -22530,6 +22535,9 @@
                               <a:lumMod val="85000"/>
                             </a:schemeClr>
                           </a:solidFill>
+                          <a:latin typeface="Urbanist" charset="0"/>
+                          <a:ea typeface="Urbanist" charset="0"/>
+                          <a:cs typeface="Urbanist" charset="0"/>
                           <a:sym typeface="Urbanist"/>
                         </a:rPr>
                         <a:t>Matrix operations for the Q-Table and vector calculations.</a:t>
@@ -22571,6 +22579,9 @@
                               <a:lumMod val="85000"/>
                             </a:schemeClr>
                           </a:solidFill>
+                          <a:latin typeface="Urbanist" charset="0"/>
+                          <a:ea typeface="Urbanist" charset="0"/>
+                          <a:cs typeface="Urbanist" charset="0"/>
                           <a:sym typeface="Urbanist"/>
                         </a:rPr>
                         <a:t>Pandas</a:t>
@@ -22610,6 +22621,9 @@
                               <a:lumMod val="85000"/>
                             </a:schemeClr>
                           </a:solidFill>
+                          <a:latin typeface="Urbanist" charset="0"/>
+                          <a:ea typeface="Urbanist" charset="0"/>
+                          <a:cs typeface="Urbanist" charset="0"/>
                           <a:sym typeface="Urbanist"/>
                         </a:rPr>
                         <a:t>Data manipulation and telemetry analysis.</a:t>
@@ -22651,6 +22665,9 @@
                               <a:lumMod val="85000"/>
                             </a:schemeClr>
                           </a:solidFill>
+                          <a:latin typeface="Urbanist" charset="0"/>
+                          <a:ea typeface="Urbanist" charset="0"/>
+                          <a:cs typeface="Urbanist" charset="0"/>
                           <a:sym typeface="Urbanist"/>
                         </a:rPr>
                         <a:t>Scikit-Learn</a:t>
@@ -22690,6 +22707,9 @@
                               <a:lumMod val="85000"/>
                             </a:schemeClr>
                           </a:solidFill>
+                          <a:latin typeface="Urbanist" charset="0"/>
+                          <a:ea typeface="Urbanist" charset="0"/>
+                          <a:cs typeface="Urbanist" charset="0"/>
                           <a:sym typeface="Urbanist"/>
                         </a:rPr>
                         <a:t>Preprocessing and normalization of behavioral data.</a:t>
@@ -22731,6 +22751,9 @@
                               <a:lumMod val="85000"/>
                             </a:schemeClr>
                           </a:solidFill>
+                          <a:latin typeface="Urbanist" charset="0"/>
+                          <a:ea typeface="Urbanist" charset="0"/>
+                          <a:cs typeface="Urbanist" charset="0"/>
                           <a:sym typeface="Urbanist"/>
                         </a:rPr>
                         <a:t>CustomTkinter</a:t>
@@ -22770,6 +22793,9 @@
                               <a:lumMod val="85000"/>
                             </a:schemeClr>
                           </a:solidFill>
+                          <a:latin typeface="Urbanist" charset="0"/>
+                          <a:ea typeface="Urbanist" charset="0"/>
+                          <a:cs typeface="Urbanist" charset="0"/>
                           <a:sym typeface="Urbanist"/>
                         </a:rPr>
                         <a:t>Modern Dark-themed UI for the System Dashboard.</a:t>
